--- a/tests-host/fixtures/slides/python-made.pptx
+++ b/tests-host/fixtures/slides/python-made.pptx
@@ -8,6 +8,7 @@
     <p:sldId id="256" r:id="rId7"/>
     <p:sldId id="257" r:id="rId9"/>
     <p:sldId id="258" r:id="rId10"/>
+    <p:sldId id="259" r:id="rId11"/>
   </p:sldIdLst>
   <p:sldSz cx="9144000" cy="6858000" type="screen4x3"/>
   <p:notesSz cx="6858000" cy="9144000"/>
@@ -107,6 +108,420 @@
     </a:lvl9pPr>
   </p:defaultTextStyle>
 </p:presentation>
+</file>
+
+<file path=ppt/charts/chart1.xml><?xml version="1.0" encoding="utf-8"?>
+<c:chartSpace xmlns:c="http://schemas.openxmlformats.org/drawingml/2006/chart" xmlns:a="http://schemas.openxmlformats.org/drawingml/2006/main" xmlns:r="http://schemas.openxmlformats.org/officeDocument/2006/relationships">
+  <c:date1904 val="0"/>
+  <c:chart>
+    <c:autoTitleDeleted val="0"/>
+    <c:plotArea>
+      <c:barChart>
+        <c:barDir val="col"/>
+        <c:grouping val="clustered"/>
+        <c:ser>
+          <c:idx val="0"/>
+          <c:order val="0"/>
+          <c:tx>
+            <c:strRef>
+              <c:f>Sheet1!$B$1</c:f>
+              <c:strCache>
+                <c:ptCount val="1"/>
+                <c:pt idx="0">
+                  <c:v>Q1 Sales</c:v>
+                </c:pt>
+              </c:strCache>
+            </c:strRef>
+          </c:tx>
+          <c:cat>
+            <c:strRef>
+              <c:f>Sheet1!$A$2:$A$4</c:f>
+              <c:strCache>
+                <c:ptCount val="3"/>
+                <c:pt idx="0">
+                  <c:v>East</c:v>
+                </c:pt>
+                <c:pt idx="1">
+                  <c:v>West</c:v>
+                </c:pt>
+                <c:pt idx="2">
+                  <c:v>Midwest</c:v>
+                </c:pt>
+              </c:strCache>
+            </c:strRef>
+          </c:cat>
+          <c:val>
+            <c:numRef>
+              <c:f>Sheet1!$B$2:$B$4</c:f>
+              <c:numCache>
+                <c:formatCode>General</c:formatCode>
+                <c:ptCount val="3"/>
+                <c:pt idx="0">
+                  <c:v>19.2</c:v>
+                </c:pt>
+                <c:pt idx="1">
+                  <c:v>21.4</c:v>
+                </c:pt>
+                <c:pt idx="2">
+                  <c:v>16.7</c:v>
+                </c:pt>
+              </c:numCache>
+            </c:numRef>
+          </c:val>
+        </c:ser>
+        <c:ser>
+          <c:idx val="1"/>
+          <c:order val="1"/>
+          <c:tx>
+            <c:strRef>
+              <c:f>Sheet1!$C$1</c:f>
+              <c:strCache>
+                <c:ptCount val="1"/>
+                <c:pt idx="0">
+                  <c:v>Q2 Sales</c:v>
+                </c:pt>
+              </c:strCache>
+            </c:strRef>
+          </c:tx>
+          <c:cat>
+            <c:strRef>
+              <c:f>Sheet1!$A$2:$A$4</c:f>
+              <c:strCache>
+                <c:ptCount val="3"/>
+                <c:pt idx="0">
+                  <c:v>East</c:v>
+                </c:pt>
+                <c:pt idx="1">
+                  <c:v>West</c:v>
+                </c:pt>
+                <c:pt idx="2">
+                  <c:v>Midwest</c:v>
+                </c:pt>
+              </c:strCache>
+            </c:strRef>
+          </c:cat>
+          <c:val>
+            <c:numRef>
+              <c:f>Sheet1!$C$2:$C$4</c:f>
+              <c:numCache>
+                <c:formatCode>General</c:formatCode>
+                <c:ptCount val="3"/>
+                <c:pt idx="0">
+                  <c:v>22.3</c:v>
+                </c:pt>
+                <c:pt idx="1">
+                  <c:v>28.6</c:v>
+                </c:pt>
+                <c:pt idx="2">
+                  <c:v>15.2</c:v>
+                </c:pt>
+              </c:numCache>
+            </c:numRef>
+          </c:val>
+        </c:ser>
+        <c:axId val="-2068027336"/>
+        <c:axId val="-2113994440"/>
+      </c:barChart>
+      <c:catAx>
+        <c:axId val="-2068027336"/>
+        <c:scaling>
+          <c:orientation val="minMax"/>
+        </c:scaling>
+        <c:delete val="0"/>
+        <c:axPos val="b"/>
+        <c:majorTickMark val="out"/>
+        <c:minorTickMark val="none"/>
+        <c:tickLblPos val="nextTo"/>
+        <c:crossAx val="-2113994440"/>
+        <c:crosses val="autoZero"/>
+        <c:auto val="1"/>
+        <c:lblAlgn val="ctr"/>
+        <c:lblOffset val="100"/>
+        <c:noMultiLvlLbl val="0"/>
+      </c:catAx>
+      <c:valAx>
+        <c:axId val="-2113994440"/>
+        <c:scaling/>
+        <c:delete val="0"/>
+        <c:axPos val="l"/>
+        <c:majorGridlines/>
+        <c:majorTickMark val="out"/>
+        <c:minorTickMark val="none"/>
+        <c:tickLblPos val="nextTo"/>
+        <c:crossAx val="-2068027336"/>
+        <c:crosses val="autoZero"/>
+      </c:valAx>
+    </c:plotArea>
+    <c:dispBlanksAs val="gap"/>
+  </c:chart>
+  <c:txPr>
+    <a:bodyPr/>
+    <a:lstStyle/>
+    <a:p>
+      <a:pPr>
+        <a:defRPr sz="1800"/>
+      </a:pPr>
+      <a:endParaRPr lang="en-US"/>
+    </a:p>
+  </c:txPr>
+  <c:externalData r:id="rId1">
+    <c:autoUpdate val="0"/>
+  </c:externalData>
+</c:chartSpace>
+</file>
+
+<file path=ppt/charts/chart2.xml><?xml version="1.0" encoding="utf-8"?>
+<c:chartSpace xmlns:c="http://schemas.openxmlformats.org/drawingml/2006/chart" xmlns:a="http://schemas.openxmlformats.org/drawingml/2006/main" xmlns:r="http://schemas.openxmlformats.org/officeDocument/2006/relationships">
+  <c:chart>
+    <c:autoTitleDeleted val="0"/>
+    <c:plotArea>
+      <c:pieChart>
+        <c:varyColors val="1"/>
+        <c:ser>
+          <c:idx val="0"/>
+          <c:order val="0"/>
+          <c:tx>
+            <c:strRef>
+              <c:f>Sheet1!$B$1</c:f>
+              <c:strCache>
+                <c:ptCount val="1"/>
+                <c:pt idx="0">
+                  <c:v>Share</c:v>
+                </c:pt>
+              </c:strCache>
+            </c:strRef>
+          </c:tx>
+          <c:cat>
+            <c:strRef>
+              <c:f>Sheet1!$A$2:$A$4</c:f>
+              <c:strCache>
+                <c:ptCount val="3"/>
+                <c:pt idx="0">
+                  <c:v>A</c:v>
+                </c:pt>
+                <c:pt idx="1">
+                  <c:v>B</c:v>
+                </c:pt>
+                <c:pt idx="2">
+                  <c:v>C</c:v>
+                </c:pt>
+              </c:strCache>
+            </c:strRef>
+          </c:cat>
+          <c:val>
+            <c:numRef>
+              <c:f>Sheet1!$B$2:$B$4</c:f>
+              <c:numCache>
+                <c:formatCode>General</c:formatCode>
+                <c:ptCount val="3"/>
+                <c:pt idx="0">
+                  <c:v>50</c:v>
+                </c:pt>
+                <c:pt idx="1">
+                  <c:v>30</c:v>
+                </c:pt>
+                <c:pt idx="2">
+                  <c:v>20</c:v>
+                </c:pt>
+              </c:numCache>
+            </c:numRef>
+          </c:val>
+        </c:ser>
+      </c:pieChart>
+    </c:plotArea>
+    <c:dispBlanksAs val="gap"/>
+  </c:chart>
+  <c:txPr>
+    <a:bodyPr/>
+    <a:lstStyle/>
+    <a:p>
+      <a:pPr>
+        <a:defRPr sz="1800"/>
+      </a:pPr>
+      <a:endParaRPr lang="en-US"/>
+    </a:p>
+  </c:txPr>
+  <c:externalData r:id="rId1">
+    <c:autoUpdate val="0"/>
+  </c:externalData>
+</c:chartSpace>
+</file>
+
+<file path=ppt/charts/chart3.xml><?xml version="1.0" encoding="utf-8"?>
+<c:chartSpace xmlns:c="http://schemas.openxmlformats.org/drawingml/2006/chart" xmlns:a="http://schemas.openxmlformats.org/drawingml/2006/main" xmlns:r="http://schemas.openxmlformats.org/officeDocument/2006/relationships">
+  <c:date1904 val="0"/>
+  <c:chart>
+    <c:autoTitleDeleted val="0"/>
+    <c:plotArea>
+      <c:lineChart>
+        <c:grouping val="standard"/>
+        <c:varyColors val="0"/>
+        <c:ser>
+          <c:idx val="0"/>
+          <c:order val="0"/>
+          <c:tx>
+            <c:strRef>
+              <c:f>Sheet1!$B$1</c:f>
+              <c:strCache>
+                <c:ptCount val="1"/>
+                <c:pt idx="0">
+                  <c:v>Q1 Sales</c:v>
+                </c:pt>
+              </c:strCache>
+            </c:strRef>
+          </c:tx>
+          <c:marker>
+            <c:symbol val="none"/>
+          </c:marker>
+          <c:cat>
+            <c:strRef>
+              <c:f>Sheet1!$A$2:$A$4</c:f>
+              <c:strCache>
+                <c:ptCount val="3"/>
+                <c:pt idx="0">
+                  <c:v>East</c:v>
+                </c:pt>
+                <c:pt idx="1">
+                  <c:v>West</c:v>
+                </c:pt>
+                <c:pt idx="2">
+                  <c:v>Midwest</c:v>
+                </c:pt>
+              </c:strCache>
+            </c:strRef>
+          </c:cat>
+          <c:val>
+            <c:numRef>
+              <c:f>Sheet1!$B$2:$B$4</c:f>
+              <c:numCache>
+                <c:formatCode>General</c:formatCode>
+                <c:ptCount val="3"/>
+                <c:pt idx="0">
+                  <c:v>19.2</c:v>
+                </c:pt>
+                <c:pt idx="1">
+                  <c:v>21.4</c:v>
+                </c:pt>
+                <c:pt idx="2">
+                  <c:v>16.7</c:v>
+                </c:pt>
+              </c:numCache>
+            </c:numRef>
+          </c:val>
+          <c:smooth val="0"/>
+        </c:ser>
+        <c:ser>
+          <c:idx val="1"/>
+          <c:order val="1"/>
+          <c:tx>
+            <c:strRef>
+              <c:f>Sheet1!$C$1</c:f>
+              <c:strCache>
+                <c:ptCount val="1"/>
+                <c:pt idx="0">
+                  <c:v>Q2 Sales</c:v>
+                </c:pt>
+              </c:strCache>
+            </c:strRef>
+          </c:tx>
+          <c:marker>
+            <c:symbol val="none"/>
+          </c:marker>
+          <c:cat>
+            <c:strRef>
+              <c:f>Sheet1!$A$2:$A$4</c:f>
+              <c:strCache>
+                <c:ptCount val="3"/>
+                <c:pt idx="0">
+                  <c:v>East</c:v>
+                </c:pt>
+                <c:pt idx="1">
+                  <c:v>West</c:v>
+                </c:pt>
+                <c:pt idx="2">
+                  <c:v>Midwest</c:v>
+                </c:pt>
+              </c:strCache>
+            </c:strRef>
+          </c:cat>
+          <c:val>
+            <c:numRef>
+              <c:f>Sheet1!$C$2:$C$4</c:f>
+              <c:numCache>
+                <c:formatCode>General</c:formatCode>
+                <c:ptCount val="3"/>
+                <c:pt idx="0">
+                  <c:v>22.3</c:v>
+                </c:pt>
+                <c:pt idx="1">
+                  <c:v>28.6</c:v>
+                </c:pt>
+                <c:pt idx="2">
+                  <c:v>15.2</c:v>
+                </c:pt>
+              </c:numCache>
+            </c:numRef>
+          </c:val>
+          <c:smooth val="0"/>
+        </c:ser>
+        <c:marker val="1"/>
+        <c:smooth val="0"/>
+        <c:axId val="2118791784"/>
+        <c:axId val="2140495176"/>
+      </c:lineChart>
+      <c:catAx>
+        <c:axId val="2118791784"/>
+        <c:scaling>
+          <c:orientation val="minMax"/>
+        </c:scaling>
+        <c:delete val="0"/>
+        <c:axPos val="b"/>
+        <c:majorTickMark val="out"/>
+        <c:minorTickMark val="none"/>
+        <c:tickLblPos val="nextTo"/>
+        <c:crossAx val="2140495176"/>
+        <c:crosses val="autoZero"/>
+        <c:auto val="1"/>
+        <c:lblAlgn val="ctr"/>
+        <c:lblOffset val="100"/>
+        <c:noMultiLvlLbl val="0"/>
+      </c:catAx>
+      <c:valAx>
+        <c:axId val="2140495176"/>
+        <c:scaling/>
+        <c:delete val="0"/>
+        <c:axPos val="l"/>
+        <c:majorGridlines/>
+        <c:majorTickMark val="out"/>
+        <c:minorTickMark val="none"/>
+        <c:tickLblPos val="nextTo"/>
+        <c:crossAx val="2118791784"/>
+        <c:crosses val="autoZero"/>
+      </c:valAx>
+    </c:plotArea>
+    <c:legend>
+      <c:legendPos val="r"/>
+      <c:layout/>
+      <c:overlay val="0"/>
+    </c:legend>
+    <c:plotVisOnly val="1"/>
+    <c:dispBlanksAs val="gap"/>
+    <c:showDLblsOverMax val="0"/>
+  </c:chart>
+  <c:txPr>
+    <a:bodyPr/>
+    <a:lstStyle/>
+    <a:p>
+      <a:pPr>
+        <a:defRPr sz="1800"/>
+      </a:pPr>
+      <a:endParaRPr lang="en-US"/>
+    </a:p>
+  </c:txPr>
+  <c:externalData r:id="rId1">
+    <c:autoUpdate val="0"/>
+  </c:externalData>
+</c:chartSpace>
 </file>
 
 <file path=ppt/notesMasters/notesMaster1.xml><?xml version="1.0" encoding="utf-8"?>
@@ -3891,6 +4306,354 @@
           </p:txBody>
         </p:sp>
       </p:grpSp>
+    </p:spTree>
+  </p:cSld>
+  <p:clrMapOvr>
+    <a:masterClrMapping/>
+  </p:clrMapOvr>
+</p:sld>
+</file>
+
+<file path=ppt/slides/slide4.xml><?xml version="1.0" encoding="utf-8"?>
+<p:sld xmlns:a="http://schemas.openxmlformats.org/drawingml/2006/main" xmlns:p="http://schemas.openxmlformats.org/presentationml/2006/main" xmlns:r="http://schemas.openxmlformats.org/officeDocument/2006/relationships">
+  <p:cSld>
+    <p:spTree>
+      <p:nvGrpSpPr>
+        <p:cNvPr id="1" name=""/>
+        <p:cNvGrpSpPr/>
+        <p:nvPr/>
+      </p:nvGrpSpPr>
+      <p:grpSpPr/>
+      <p:sp>
+        <p:nvSpPr>
+          <p:cNvPr id="2" name="Title 1"/>
+          <p:cNvSpPr>
+            <a:spLocks noGrp="1"/>
+          </p:cNvSpPr>
+          <p:nvPr>
+            <p:ph type="title"/>
+          </p:nvPr>
+        </p:nvSpPr>
+        <p:spPr/>
+        <p:txBody>
+          <a:bodyPr/>
+          <a:lstStyle/>
+          <a:p>
+            <a:r>
+              <a:t>Tables and charts</a:t>
+            </a:r>
+          </a:p>
+        </p:txBody>
+      </p:sp>
+      <p:graphicFrame>
+        <p:nvGraphicFramePr>
+          <p:cNvPr id="3" name="Table 2"/>
+          <p:cNvGraphicFramePr>
+            <a:graphicFrameLocks noGrp="1"/>
+          </p:cNvGraphicFramePr>
+          <p:nvPr/>
+        </p:nvGraphicFramePr>
+        <p:xfrm>
+          <a:off x="457200" y="1371600"/>
+          <a:ext cx="3657600" cy="1097280"/>
+        </p:xfrm>
+        <a:graphic>
+          <a:graphicData uri="http://schemas.openxmlformats.org/drawingml/2006/table">
+            <a:tbl>
+              <a:tblPr firstRow="1" bandRow="1">
+                <a:tableStyleId>{5C22544A-7EE6-4342-B048-85BDC9FD1C3A}</a:tableStyleId>
+              </a:tblPr>
+              <a:tblGrid>
+                <a:gridCol w="1219200"/>
+                <a:gridCol w="1219200"/>
+                <a:gridCol w="1219200"/>
+              </a:tblGrid>
+              <a:tr h="365760">
+                <a:tc>
+                  <a:txBody>
+                    <a:bodyPr/>
+                    <a:lstStyle/>
+                    <a:p/>
+                  </a:txBody>
+                  <a:tcPr/>
+                </a:tc>
+                <a:tc>
+                  <a:txBody>
+                    <a:bodyPr/>
+                    <a:lstStyle/>
+                    <a:p>
+                      <a:r>
+                        <a:t>Q1</a:t>
+                      </a:r>
+                    </a:p>
+                  </a:txBody>
+                  <a:tcPr/>
+                </a:tc>
+                <a:tc>
+                  <a:txBody>
+                    <a:bodyPr/>
+                    <a:lstStyle/>
+                    <a:p>
+                      <a:r>
+                        <a:t>Q2</a:t>
+                      </a:r>
+                    </a:p>
+                  </a:txBody>
+                  <a:tcPr/>
+                </a:tc>
+              </a:tr>
+              <a:tr h="365760">
+                <a:tc>
+                  <a:txBody>
+                    <a:bodyPr/>
+                    <a:lstStyle/>
+                    <a:p>
+                      <a:r>
+                        <a:t>North</a:t>
+                      </a:r>
+                    </a:p>
+                  </a:txBody>
+                  <a:tcPr/>
+                </a:tc>
+                <a:tc>
+                  <a:txBody>
+                    <a:bodyPr/>
+                    <a:lstStyle/>
+                    <a:p>
+                      <a:r>
+                        <a:t>5</a:t>
+                      </a:r>
+                    </a:p>
+                  </a:txBody>
+                  <a:tcPr/>
+                </a:tc>
+                <a:tc>
+                  <a:txBody>
+                    <a:bodyPr/>
+                    <a:lstStyle/>
+                    <a:p>
+                      <a:r>
+                        <a:t>6</a:t>
+                      </a:r>
+                    </a:p>
+                  </a:txBody>
+                  <a:tcPr/>
+                </a:tc>
+              </a:tr>
+              <a:tr h="365760">
+                <a:tc>
+                  <a:txBody>
+                    <a:bodyPr/>
+                    <a:lstStyle/>
+                    <a:p>
+                      <a:r>
+                        <a:t>South</a:t>
+                      </a:r>
+                    </a:p>
+                  </a:txBody>
+                  <a:tcPr/>
+                </a:tc>
+                <a:tc>
+                  <a:txBody>
+                    <a:bodyPr/>
+                    <a:lstStyle/>
+                    <a:p>
+                      <a:r>
+                        <a:t>8</a:t>
+                      </a:r>
+                    </a:p>
+                  </a:txBody>
+                  <a:tcPr/>
+                </a:tc>
+                <a:tc>
+                  <a:txBody>
+                    <a:bodyPr/>
+                    <a:lstStyle/>
+                    <a:p>
+                      <a:r>
+                        <a:t>7</a:t>
+                      </a:r>
+                    </a:p>
+                  </a:txBody>
+                  <a:tcPr/>
+                </a:tc>
+              </a:tr>
+            </a:tbl>
+          </a:graphicData>
+        </a:graphic>
+      </p:graphicFrame>
+      <p:graphicFrame>
+        <p:nvGraphicFramePr>
+          <p:cNvPr id="4" name="Chart 3"/>
+          <p:cNvGraphicFramePr>
+            <a:graphicFrameLocks noGrp="1"/>
+          </p:cNvGraphicFramePr>
+          <p:nvPr/>
+        </p:nvGraphicFramePr>
+        <p:xfrm>
+          <a:off x="4572000" y="1371600"/>
+          <a:ext cx="4114800" cy="2286000"/>
+        </p:xfrm>
+        <a:graphic>
+          <a:graphicData uri="http://schemas.openxmlformats.org/drawingml/2006/chart">
+            <c:chart xmlns:c="http://schemas.openxmlformats.org/drawingml/2006/chart" r:id="rId2"/>
+          </a:graphicData>
+        </a:graphic>
+      </p:graphicFrame>
+      <p:graphicFrame>
+        <p:nvGraphicFramePr>
+          <p:cNvPr id="5" name="Chart 4"/>
+          <p:cNvGraphicFramePr>
+            <a:graphicFrameLocks noGrp="1"/>
+          </p:cNvGraphicFramePr>
+          <p:nvPr/>
+        </p:nvGraphicFramePr>
+        <p:xfrm>
+          <a:off x="457200" y="2743200"/>
+          <a:ext cx="2743200" cy="2286000"/>
+        </p:xfrm>
+        <a:graphic>
+          <a:graphicData uri="http://schemas.openxmlformats.org/drawingml/2006/chart">
+            <c:chart xmlns:c="http://schemas.openxmlformats.org/drawingml/2006/chart" r:id="rId3"/>
+          </a:graphicData>
+        </a:graphic>
+      </p:graphicFrame>
+      <p:graphicFrame>
+        <p:nvGraphicFramePr>
+          <p:cNvPr id="6" name="Chart 5"/>
+          <p:cNvGraphicFramePr>
+            <a:graphicFrameLocks noGrp="1"/>
+          </p:cNvGraphicFramePr>
+          <p:nvPr/>
+        </p:nvGraphicFramePr>
+        <p:xfrm>
+          <a:off x="3200400" y="3840480"/>
+          <a:ext cx="2743200" cy="2286000"/>
+        </p:xfrm>
+        <a:graphic>
+          <a:graphicData uri="http://schemas.openxmlformats.org/drawingml/2006/chart">
+            <c:chart xmlns:c="http://schemas.openxmlformats.org/drawingml/2006/chart" r:id="rId4"/>
+          </a:graphicData>
+        </a:graphic>
+      </p:graphicFrame>
+      <p:cxnSp>
+        <p:nvCxnSpPr>
+          <p:cNvPr id="7" name="Connector 6"/>
+          <p:cNvCxnSpPr/>
+          <p:nvPr/>
+        </p:nvCxnSpPr>
+        <p:spPr>
+          <a:xfrm>
+            <a:off x="5943600" y="4572000"/>
+            <a:ext cx="2286000" cy="914400"/>
+          </a:xfrm>
+          <a:prstGeom prst="line">
+            <a:avLst/>
+          </a:prstGeom>
+          <a:ln>
+            <a:tailEnd type="triangle"/>
+          </a:ln>
+        </p:spPr>
+        <p:style>
+          <a:lnRef idx="2">
+            <a:schemeClr val="accent1"/>
+          </a:lnRef>
+          <a:fillRef idx="0">
+            <a:schemeClr val="accent1"/>
+          </a:fillRef>
+          <a:effectRef idx="1">
+            <a:schemeClr val="accent1"/>
+          </a:effectRef>
+          <a:fontRef idx="minor">
+            <a:schemeClr val="tx1"/>
+          </a:fontRef>
+        </p:style>
+      </p:cxnSp>
+      <p:sp>
+        <p:nvSpPr>
+          <p:cNvPr id="8" name="5-Point Star 7"/>
+          <p:cNvSpPr/>
+          <p:nvPr/>
+        </p:nvSpPr>
+        <p:spPr>
+          <a:xfrm rot="2700000">
+            <a:off x="7315200" y="3657600"/>
+            <a:ext cx="1371600" cy="1371600"/>
+          </a:xfrm>
+          <a:prstGeom prst="star5">
+            <a:avLst/>
+          </a:prstGeom>
+        </p:spPr>
+        <p:style>
+          <a:lnRef idx="1">
+            <a:schemeClr val="accent1"/>
+          </a:lnRef>
+          <a:fillRef idx="3">
+            <a:schemeClr val="accent1"/>
+          </a:fillRef>
+          <a:effectRef idx="2">
+            <a:schemeClr val="accent1"/>
+          </a:effectRef>
+          <a:fontRef idx="minor">
+            <a:schemeClr val="lt1"/>
+          </a:fontRef>
+        </p:style>
+        <p:txBody>
+          <a:bodyPr rtlCol="0" anchor="ctr"/>
+          <a:lstStyle/>
+          <a:p>
+            <a:pPr algn="ctr"/>
+          </a:p>
+        </p:txBody>
+      </p:sp>
+      <p:sp>
+        <p:nvSpPr>
+          <p:cNvPr id="9" name="Rectangle 8"/>
+          <p:cNvSpPr/>
+          <p:nvPr/>
+        </p:nvSpPr>
+        <p:spPr>
+          <a:xfrm>
+            <a:off x="6217920" y="5669280"/>
+            <a:ext cx="2286000" cy="914400"/>
+          </a:xfrm>
+          <a:prstGeom prst="rect">
+            <a:avLst/>
+          </a:prstGeom>
+          <a:gradFill rotWithShape="1">
+            <a:gsLst>
+              <a:gs pos="0">
+                <a:srgbClr val="FF0000"/>
+              </a:gs>
+              <a:gs pos="100000">
+                <a:srgbClr val="0000FF"/>
+              </a:gs>
+            </a:gsLst>
+            <a:lin scaled="0"/>
+          </a:gradFill>
+        </p:spPr>
+        <p:style>
+          <a:lnRef idx="1">
+            <a:schemeClr val="accent1"/>
+          </a:lnRef>
+          <a:fillRef idx="3">
+            <a:schemeClr val="accent1"/>
+          </a:fillRef>
+          <a:effectRef idx="2">
+            <a:schemeClr val="accent1"/>
+          </a:effectRef>
+          <a:fontRef idx="minor">
+            <a:schemeClr val="lt1"/>
+          </a:fontRef>
+        </p:style>
+        <p:txBody>
+          <a:bodyPr rtlCol="0" anchor="ctr"/>
+          <a:lstStyle/>
+          <a:p>
+            <a:pPr algn="ctr"/>
+          </a:p>
+        </p:txBody>
+      </p:sp>
     </p:spTree>
   </p:cSld>
   <p:clrMapOvr>
